--- a/docs/free-rwe-resources/train-the-trainer/training/day-02-vocab-dqd/kit/Instructor-Deck-with-Notes.pptx
+++ b/docs/free-rwe-resources/train-the-trainer/training/day-02-vocab-dqd/kit/Instructor-Deck-with-Notes.pptx
@@ -593,7 +593,7 @@
           <a:lstStyle/>
           <a:p>
             <a:r>
-              <a:t>Walk through each category with a real example from the training CDM if possible. Key message: 'failed' doesn't mean 'unusable' — a high unmapped rate in a domain irrelevant to your study doesn't matter.</a:t>
+              <a:t>Walk each category with a real example from the training CDM. Then make the second axis explicit: the same category can be VERIFIED against the system's own rules or VALIDATED against an external benchmark. DQD labels every check by category and context, so learners will see both words in the report. Key message: 'failed' doesn't mean 'unusable' — a high unmapped rate in a domain irrelevant to your study doesn't matter.</a:t>
             </a:r>
           </a:p>
         </p:txBody>
@@ -4701,7 +4701,7 @@
                 </a:solidFill>
                 <a:latin typeface="Gotham Narrow"/>
               </a:rPr>
-              <a:t>The Kahn Framework — Three Categories</a:t>
+              <a:t>The Kahn Framework — Two Axes</a:t>
             </a:r>
           </a:p>
         </p:txBody>
@@ -4826,13 +4826,13 @@
                     <a:lstStyle/>
                     <a:p>
                       <a:r>
-                        <a:rPr sz="1300">
+                        <a:rPr sz="1250" b="0">
                           <a:solidFill>
-                            <a:srgbClr val="191919"/>
+                            <a:srgbClr val="2B2B2B"/>
                           </a:solidFill>
                           <a:latin typeface="Arial"/>
                         </a:rPr>
-                        <a:t>Do values follow expected format, type, and relational rules?</a:t>
+                        <a:t>Do values follow expected format, type, and relational rules?  Subtypes: value · relational · computational.</a:t>
                       </a:r>
                     </a:p>
                   </a:txBody>
@@ -4894,13 +4894,13 @@
                     <a:lstStyle/>
                     <a:p>
                       <a:r>
-                        <a:rPr sz="1300">
+                        <a:rPr sz="1250" b="0">
                           <a:solidFill>
-                            <a:srgbClr val="191919"/>
+                            <a:srgbClr val="2B2B2B"/>
                           </a:solidFill>
                           <a:latin typeface="Arial"/>
                         </a:rPr>
-                        <a:t>Are values present where they are expected to be?</a:t>
+                        <a:t>Are values present where expected? (No subtypes — presence only, regardless of value.)</a:t>
                       </a:r>
                     </a:p>
                   </a:txBody>
@@ -4962,13 +4962,13 @@
                     <a:lstStyle/>
                     <a:p>
                       <a:r>
-                        <a:rPr sz="1300">
+                        <a:rPr sz="1250" b="0">
                           <a:solidFill>
-                            <a:srgbClr val="191919"/>
+                            <a:srgbClr val="2B2B2B"/>
                           </a:solidFill>
                           <a:latin typeface="Arial"/>
                         </a:rPr>
-                        <a:t>Are values believable, given what we know clinically?</a:t>
+                        <a:t>Are values believable, given what we know clinically?  Subtypes: uniqueness · atemporal · temporal.</a:t>
                       </a:r>
                     </a:p>
                   </a:txBody>
@@ -5005,6 +5005,305 @@
           </a:graphicData>
         </a:graphic>
       </p:graphicFrame>
+      <p:sp>
+        <p:nvSpPr>
+          <p:cNvPr id="6" name="TextBox 5"/>
+          <p:cNvSpPr txBox="1"/>
+          <p:nvPr/>
+        </p:nvSpPr>
+        <p:spPr>
+          <a:xfrm>
+            <a:off x="475488" y="3611880"/>
+            <a:ext cx="11247120" cy="320040"/>
+          </a:xfrm>
+          <a:prstGeom prst="rect">
+            <a:avLst/>
+          </a:prstGeom>
+          <a:noFill/>
+        </p:spPr>
+        <p:txBody>
+          <a:bodyPr wrap="none">
+            <a:spAutoFit/>
+          </a:bodyPr>
+          <a:lstStyle/>
+          <a:p>
+            <a:r>
+              <a:rPr sz="1400" b="1">
+                <a:solidFill>
+                  <a:srgbClr val="20425A"/>
+                </a:solidFill>
+                <a:latin typeface="Arial"/>
+              </a:rPr>
+              <a:t>Two assessment contexts — every check is also one of these:</a:t>
+            </a:r>
+          </a:p>
+        </p:txBody>
+      </p:sp>
+      <p:graphicFrame>
+        <p:nvGraphicFramePr>
+          <p:cNvPr id="7" name="Table 6"/>
+          <p:cNvGraphicFramePr>
+            <a:graphicFrameLocks noGrp="1"/>
+          </p:cNvGraphicFramePr>
+          <p:nvPr/>
+        </p:nvGraphicFramePr>
+        <p:xfrm>
+          <a:off x="475488" y="3977639"/>
+          <a:ext cx="11247120" cy="1737360"/>
+        </p:xfrm>
+        <a:graphic>
+          <a:graphicData uri="http://schemas.openxmlformats.org/drawingml/2006/table">
+            <a:tbl>
+              <a:tblPr firstRow="1" bandRow="1">
+                <a:tableStyleId>{5C22544A-7EE6-4342-B048-85BDC9FD1C3A}</a:tableStyleId>
+              </a:tblPr>
+              <a:tblGrid>
+                <a:gridCol w="2103120"/>
+                <a:gridCol w="4206240"/>
+                <a:gridCol w="4937760"/>
+              </a:tblGrid>
+              <a:tr h="579120">
+                <a:tc>
+                  <a:txBody>
+                    <a:bodyPr/>
+                    <a:lstStyle/>
+                    <a:p>
+                      <a:r>
+                        <a:rPr sz="1300" b="1">
+                          <a:solidFill>
+                            <a:srgbClr val="FFFFFF"/>
+                          </a:solidFill>
+                          <a:latin typeface="Arial"/>
+                        </a:rPr>
+                        <a:t>Context</a:t>
+                      </a:r>
+                    </a:p>
+                  </a:txBody>
+                  <a:tcPr anchor="ctr">
+                    <a:solidFill>
+                      <a:srgbClr val="20425A"/>
+                    </a:solidFill>
+                  </a:tcPr>
+                </a:tc>
+                <a:tc>
+                  <a:txBody>
+                    <a:bodyPr/>
+                    <a:lstStyle/>
+                    <a:p>
+                      <a:r>
+                        <a:rPr sz="1300" b="1">
+                          <a:solidFill>
+                            <a:srgbClr val="FFFFFF"/>
+                          </a:solidFill>
+                          <a:latin typeface="Arial"/>
+                        </a:rPr>
+                        <a:t>You check the data against…</a:t>
+                      </a:r>
+                    </a:p>
+                  </a:txBody>
+                  <a:tcPr anchor="ctr">
+                    <a:solidFill>
+                      <a:srgbClr val="20425A"/>
+                    </a:solidFill>
+                  </a:tcPr>
+                </a:tc>
+                <a:tc>
+                  <a:txBody>
+                    <a:bodyPr/>
+                    <a:lstStyle/>
+                    <a:p>
+                      <a:r>
+                        <a:rPr sz="1300" b="1">
+                          <a:solidFill>
+                            <a:srgbClr val="FFFFFF"/>
+                          </a:solidFill>
+                          <a:latin typeface="Arial"/>
+                        </a:rPr>
+                        <a:t>Example (a plausibility check)</a:t>
+                      </a:r>
+                    </a:p>
+                  </a:txBody>
+                  <a:tcPr anchor="ctr">
+                    <a:solidFill>
+                      <a:srgbClr val="20425A"/>
+                    </a:solidFill>
+                  </a:tcPr>
+                </a:tc>
+              </a:tr>
+              <a:tr h="579120">
+                <a:tc>
+                  <a:txBody>
+                    <a:bodyPr/>
+                    <a:lstStyle/>
+                    <a:p>
+                      <a:r>
+                        <a:rPr sz="1250" b="1">
+                          <a:solidFill>
+                            <a:srgbClr val="2B2B2B"/>
+                          </a:solidFill>
+                          <a:latin typeface="Arial"/>
+                        </a:rPr>
+                        <a:t>Verification</a:t>
+                      </a:r>
+                    </a:p>
+                  </a:txBody>
+                  <a:tcPr anchor="ctr">
+                    <a:solidFill>
+                      <a:srgbClr val="EEF2F5"/>
+                    </a:solidFill>
+                  </a:tcPr>
+                </a:tc>
+                <a:tc>
+                  <a:txBody>
+                    <a:bodyPr/>
+                    <a:lstStyle/>
+                    <a:p>
+                      <a:r>
+                        <a:rPr sz="1250" b="0">
+                          <a:solidFill>
+                            <a:srgbClr val="2B2B2B"/>
+                          </a:solidFill>
+                          <a:latin typeface="Arial"/>
+                        </a:rPr>
+                        <a:t>the system’s own rules, metadata, and specifications — no outside reference</a:t>
+                      </a:r>
+                    </a:p>
+                  </a:txBody>
+                  <a:tcPr anchor="ctr">
+                    <a:solidFill>
+                      <a:srgbClr val="EEF2F5"/>
+                    </a:solidFill>
+                  </a:tcPr>
+                </a:tc>
+                <a:tc>
+                  <a:txBody>
+                    <a:bodyPr/>
+                    <a:lstStyle/>
+                    <a:p>
+                      <a:r>
+                        <a:rPr sz="1250" b="0">
+                          <a:solidFill>
+                            <a:srgbClr val="2B2B2B"/>
+                          </a:solidFill>
+                          <a:latin typeface="Arial"/>
+                        </a:rPr>
+                        <a:t>“No birth dates in the future” — checked against internal logic</a:t>
+                      </a:r>
+                    </a:p>
+                  </a:txBody>
+                  <a:tcPr anchor="ctr">
+                    <a:solidFill>
+                      <a:srgbClr val="EEF2F5"/>
+                    </a:solidFill>
+                  </a:tcPr>
+                </a:tc>
+              </a:tr>
+              <a:tr h="579120">
+                <a:tc>
+                  <a:txBody>
+                    <a:bodyPr/>
+                    <a:lstStyle/>
+                    <a:p>
+                      <a:r>
+                        <a:rPr sz="1250" b="1">
+                          <a:solidFill>
+                            <a:srgbClr val="2B2B2B"/>
+                          </a:solidFill>
+                          <a:latin typeface="Arial"/>
+                        </a:rPr>
+                        <a:t>Validation</a:t>
+                      </a:r>
+                    </a:p>
+                  </a:txBody>
+                  <a:tcPr anchor="ctr">
+                    <a:solidFill>
+                      <a:srgbClr val="FFFFFF"/>
+                    </a:solidFill>
+                  </a:tcPr>
+                </a:tc>
+                <a:tc>
+                  <a:txBody>
+                    <a:bodyPr/>
+                    <a:lstStyle/>
+                    <a:p>
+                      <a:r>
+                        <a:rPr sz="1250" b="0">
+                          <a:solidFill>
+                            <a:srgbClr val="2B2B2B"/>
+                          </a:solidFill>
+                          <a:latin typeface="Arial"/>
+                        </a:rPr>
+                        <a:t>an external, trusted benchmark — a gold standard or published rates</a:t>
+                      </a:r>
+                    </a:p>
+                  </a:txBody>
+                  <a:tcPr anchor="ctr">
+                    <a:solidFill>
+                      <a:srgbClr val="FFFFFF"/>
+                    </a:solidFill>
+                  </a:tcPr>
+                </a:tc>
+                <a:tc>
+                  <a:txBody>
+                    <a:bodyPr/>
+                    <a:lstStyle/>
+                    <a:p>
+                      <a:r>
+                        <a:rPr sz="1250" b="0">
+                          <a:solidFill>
+                            <a:srgbClr val="2B2B2B"/>
+                          </a:solidFill>
+                          <a:latin typeface="Arial"/>
+                        </a:rPr>
+                        <a:t>“Our diabetes prevalence matches published national estimates”</a:t>
+                      </a:r>
+                    </a:p>
+                  </a:txBody>
+                  <a:tcPr anchor="ctr">
+                    <a:solidFill>
+                      <a:srgbClr val="FFFFFF"/>
+                    </a:solidFill>
+                  </a:tcPr>
+                </a:tc>
+              </a:tr>
+            </a:tbl>
+          </a:graphicData>
+        </a:graphic>
+      </p:graphicFrame>
+      <p:sp>
+        <p:nvSpPr>
+          <p:cNvPr id="8" name="TextBox 7"/>
+          <p:cNvSpPr txBox="1"/>
+          <p:nvPr/>
+        </p:nvSpPr>
+        <p:spPr>
+          <a:xfrm>
+            <a:off x="475488" y="5989320"/>
+            <a:ext cx="11247120" cy="457200"/>
+          </a:xfrm>
+          <a:prstGeom prst="rect">
+            <a:avLst/>
+          </a:prstGeom>
+          <a:noFill/>
+        </p:spPr>
+        <p:txBody>
+          <a:bodyPr wrap="none">
+            <a:spAutoFit/>
+          </a:bodyPr>
+          <a:lstStyle/>
+          <a:p>
+            <a:r>
+              <a:rPr sz="1250" i="1">
+                <a:solidFill>
+                  <a:srgbClr val="20425A"/>
+                </a:solidFill>
+                <a:latin typeface="Arial"/>
+              </a:rPr>
+              <a:t>DQD tags every check by BOTH its category and its context — that pairing is the framework.</a:t>
+            </a:r>
+          </a:p>
+        </p:txBody>
+      </p:sp>
     </p:spTree>
   </p:cSld>
   <p:clrMapOvr>
@@ -9429,7 +9728,7 @@
                 </a:solidFill>
                 <a:latin typeface="Arial"/>
               </a:rPr>
-              <a:t>✓  The Kahn framework gives three categories: conformance, completeness, plausibility</a:t>
+              <a:t>✓  The Kahn framework has two axes: three categories (conformance, completeness, plausibility) × two contexts (verification, validation)</a:t>
             </a:r>
           </a:p>
         </p:txBody>
@@ -12295,7 +12594,7 @@
                 </a:solidFill>
                 <a:latin typeface="Arial"/>
               </a:rPr>
-              <a:t>Explain the Kahn framework categories for data quality (conformance, completeness, plausibility)</a:t>
+              <a:t>Explain the Kahn framework: three categories (conformance, completeness, plausibility) and two assessment contexts (verification, validation)</a:t>
             </a:r>
           </a:p>
         </p:txBody>
